--- a/public/samples/financial_charts.pptx
+++ b/public/samples/financial_charts.pptx
@@ -152,7 +152,7 @@
                 <a:pPr>
                   <a:defRPr b="0" i="0" strike="noStrike" sz="1200" u="none">
                     <a:solidFill>
-                      <a:srgbClr val="0F172A"/>
+                      <a:srgbClr val="000000"/>
                     </a:solidFill>
                     <a:latin typeface="Arial"/>
                   </a:defRPr>
@@ -160,7 +160,7 @@
               </a:p>
             </c:txPr>
             <c:showLegendKey val="0"/>
-            <c:showVal val="1"/>
+            <c:showVal val="0"/>
             <c:showCatName val="0"/>
             <c:showSerName val="0"/>
             <c:showPercent val="0"/>
@@ -264,7 +264,7 @@
               <a:pPr>
                 <a:defRPr b="0" i="0" strike="noStrike" sz="1200" u="none">
                   <a:solidFill>
-                    <a:srgbClr val="0F172A"/>
+                    <a:srgbClr val="000000"/>
                   </a:solidFill>
                   <a:latin typeface="Arial"/>
                 </a:defRPr>
@@ -272,7 +272,7 @@
             </a:p>
           </c:txPr>
           <c:showLegendKey val="0"/>
-          <c:showVal val="1"/>
+          <c:showVal val="0"/>
           <c:showCatName val="0"/>
           <c:showSerName val="0"/>
           <c:showPercent val="0"/>
@@ -310,7 +310,7 @@
           <a:lstStyle/>
           <a:p>
             <a:pPr>
-              <a:defRPr sz="1200" b="0" i="0" u="none" strike="noStrike">
+              <a:defRPr sz="1000" b="0" i="0" u="none" strike="noStrike">
                 <a:solidFill>
                   <a:srgbClr val="64748B"/>
                 </a:solidFill>
@@ -337,9 +337,9 @@
           <c:spPr>
             <a:ln w="12700" cap="flat">
               <a:solidFill>
-                <a:srgbClr val="888888"/>
+                <a:srgbClr val="f8fafc"/>
               </a:solidFill>
-              <a:prstDash val="solid"/>
+              <a:prstDash val="dash"/>
               <a:round/>
             </a:ln>
           </c:spPr>
@@ -362,7 +362,7 @@
           <a:lstStyle/>
           <a:p>
             <a:pPr>
-              <a:defRPr sz="1200" b="0" i="0" u="none" strike="noStrike">
+              <a:defRPr sz="1000" b="0" i="0" u="none" strike="noStrike">
                 <a:solidFill>
                   <a:srgbClr val="64748B"/>
                 </a:solidFill>
@@ -447,7 +447,7 @@
                 <a:pPr>
                   <a:defRPr b="0" i="0" strike="noStrike" sz="1200" u="none">
                     <a:solidFill>
-                      <a:srgbClr val="0F172A"/>
+                      <a:srgbClr val="000000"/>
                     </a:solidFill>
                     <a:latin typeface="Arial"/>
                   </a:defRPr>
@@ -455,7 +455,7 @@
               </a:p>
             </c:txPr>
             <c:showLegendKey val="0"/>
-            <c:showVal val="1"/>
+            <c:showVal val="0"/>
             <c:showCatName val="0"/>
             <c:showSerName val="0"/>
             <c:showPercent val="0"/>
@@ -539,7 +539,7 @@
               <a:pPr>
                 <a:defRPr b="0" i="0" strike="noStrike" sz="1200" u="none">
                   <a:solidFill>
-                    <a:srgbClr val="0F172A"/>
+                    <a:srgbClr val="000000"/>
                   </a:solidFill>
                   <a:latin typeface="Arial"/>
                 </a:defRPr>
@@ -547,7 +547,7 @@
             </a:p>
           </c:txPr>
           <c:showLegendKey val="0"/>
-          <c:showVal val="1"/>
+          <c:showVal val="0"/>
           <c:showCatName val="0"/>
           <c:showSerName val="0"/>
           <c:showPercent val="0"/>
@@ -584,7 +584,7 @@
           <a:lstStyle/>
           <a:p>
             <a:pPr>
-              <a:defRPr sz="1200" b="0" i="0" u="none" strike="noStrike">
+              <a:defRPr sz="1000" b="0" i="0" u="none" strike="noStrike">
                 <a:solidFill>
                   <a:srgbClr val="64748B"/>
                 </a:solidFill>
@@ -611,9 +611,9 @@
           <c:spPr>
             <a:ln w="12700" cap="flat">
               <a:solidFill>
-                <a:srgbClr val="888888"/>
+                <a:srgbClr val="f8fafc"/>
               </a:solidFill>
-              <a:prstDash val="solid"/>
+              <a:prstDash val="dash"/>
               <a:round/>
             </a:ln>
           </c:spPr>
@@ -636,7 +636,7 @@
           <a:lstStyle/>
           <a:p>
             <a:pPr>
-              <a:defRPr sz="1200" b="0" i="0" u="none" strike="noStrike">
+              <a:defRPr sz="1000" b="0" i="0" u="none" strike="noStrike">
                 <a:solidFill>
                   <a:srgbClr val="64748B"/>
                 </a:solidFill>
@@ -754,105 +754,105 @@
           <c:dLbls>
             <c:dLbl>
               <c:idx val="0"/>
-              <c:numFmt formatCode="General" sourceLinked="0"/>
+              <c:numFmt formatCode="0%" sourceLinked="0"/>
               <c:spPr/>
               <c:txPr>
                 <a:bodyPr/>
                 <a:lstStyle/>
                 <a:p>
                   <a:pPr>
-                    <a:defRPr sz="1200" b="0" i="0" u="none" strike="noStrike">
+                    <a:defRPr sz="1100" b="0" i="0" u="none" strike="noStrike">
                       <a:solidFill>
-                        <a:srgbClr val="0F172A"/>
+                        <a:srgbClr val="FFFFFF"/>
                       </a:solidFill>
-                      <a:latin typeface="Arial"/>
+                      <a:latin typeface="Calibri"/>
                     </a:defRPr>
                   </a:pPr>
                 </a:p>
               </c:txPr>
               <c:showLegendKey val="0"/>
-              <c:showVal val="1"/>
+              <c:showVal val="0"/>
               <c:showCatName val="0"/>
               <c:showSerName val="0"/>
-              <c:showPercent val="0"/>
+              <c:showPercent val="1"/>
               <c:showBubbleSize val="0"/>
             </c:dLbl>
             <c:dLbl>
               <c:idx val="1"/>
-              <c:numFmt formatCode="General" sourceLinked="0"/>
+              <c:numFmt formatCode="0%" sourceLinked="0"/>
               <c:spPr/>
               <c:txPr>
                 <a:bodyPr/>
                 <a:lstStyle/>
                 <a:p>
                   <a:pPr>
-                    <a:defRPr sz="1200" b="0" i="0" u="none" strike="noStrike">
+                    <a:defRPr sz="1100" b="0" i="0" u="none" strike="noStrike">
                       <a:solidFill>
-                        <a:srgbClr val="0F172A"/>
+                        <a:srgbClr val="FFFFFF"/>
                       </a:solidFill>
-                      <a:latin typeface="Arial"/>
+                      <a:latin typeface="Calibri"/>
                     </a:defRPr>
                   </a:pPr>
                 </a:p>
               </c:txPr>
               <c:showLegendKey val="0"/>
-              <c:showVal val="1"/>
+              <c:showVal val="0"/>
               <c:showCatName val="0"/>
               <c:showSerName val="0"/>
-              <c:showPercent val="0"/>
+              <c:showPercent val="1"/>
               <c:showBubbleSize val="0"/>
             </c:dLbl>
             <c:dLbl>
               <c:idx val="2"/>
-              <c:numFmt formatCode="General" sourceLinked="0"/>
+              <c:numFmt formatCode="0%" sourceLinked="0"/>
               <c:spPr/>
               <c:txPr>
                 <a:bodyPr/>
                 <a:lstStyle/>
                 <a:p>
                   <a:pPr>
-                    <a:defRPr sz="1200" b="0" i="0" u="none" strike="noStrike">
+                    <a:defRPr sz="1100" b="0" i="0" u="none" strike="noStrike">
                       <a:solidFill>
-                        <a:srgbClr val="0F172A"/>
+                        <a:srgbClr val="FFFFFF"/>
                       </a:solidFill>
-                      <a:latin typeface="Arial"/>
+                      <a:latin typeface="Calibri"/>
                     </a:defRPr>
                   </a:pPr>
                 </a:p>
               </c:txPr>
               <c:showLegendKey val="0"/>
-              <c:showVal val="1"/>
+              <c:showVal val="0"/>
               <c:showCatName val="0"/>
               <c:showSerName val="0"/>
-              <c:showPercent val="0"/>
+              <c:showPercent val="1"/>
               <c:showBubbleSize val="0"/>
             </c:dLbl>
             <c:dLbl>
               <c:idx val="3"/>
-              <c:numFmt formatCode="General" sourceLinked="0"/>
+              <c:numFmt formatCode="0%" sourceLinked="0"/>
               <c:spPr/>
               <c:txPr>
                 <a:bodyPr/>
                 <a:lstStyle/>
                 <a:p>
                   <a:pPr>
-                    <a:defRPr sz="1200" b="0" i="0" u="none" strike="noStrike">
+                    <a:defRPr sz="1100" b="0" i="0" u="none" strike="noStrike">
                       <a:solidFill>
-                        <a:srgbClr val="0F172A"/>
+                        <a:srgbClr val="FFFFFF"/>
                       </a:solidFill>
-                      <a:latin typeface="Arial"/>
+                      <a:latin typeface="Calibri"/>
                     </a:defRPr>
                   </a:pPr>
                 </a:p>
               </c:txPr>
               <c:showLegendKey val="0"/>
-              <c:showVal val="1"/>
+              <c:showVal val="0"/>
               <c:showCatName val="0"/>
               <c:showSerName val="0"/>
-              <c:showPercent val="0"/>
+              <c:showPercent val="1"/>
               <c:showBubbleSize val="0"/>
             </c:dLbl>
-            <c:numFmt formatCode="General" sourceLinked="0"/>
+            <c:numFmt formatCode="0%" sourceLinked="0"/>
             <c:txPr>
               <a:bodyPr/>
               <a:lstStyle/>
@@ -928,8 +928,24 @@
       </c:spPr>
     </c:plotArea>
     <c:legend>
-      <c:legendPos val="r"/>
+      <c:legendPos val="b"/>
       <c:overlay val="0"/>
+      <c:txPr>
+        <a:bodyPr/>
+        <a:lstStyle/>
+        <a:p>
+          <a:pPr>
+            <a:defRPr sz="1100">
+              <a:solidFill>
+                <a:srgbClr val="64748B"/>
+              </a:solidFill>
+              <a:latin typeface="Calibri"/>
+              <a:cs typeface="Calibri"/>
+            </a:defRPr>
+          </a:pPr>
+          <a:endParaRPr lang="en-US"/>
+        </a:p>
+      </c:txPr>
     </c:legend>
     <c:plotVisOnly val="1"/>
     <c:dispBlanksAs val="span"/>
@@ -2013,8 +2029,8 @@
         </p:nvSpPr>
         <p:spPr>
           <a:xfrm>
-            <a:off x="1219200" y="2194560"/>
-            <a:ext cx="9753600" cy="1645920"/>
+            <a:off x="1219200" y="2400300"/>
+            <a:ext cx="9753600" cy="1371600"/>
           </a:xfrm>
           <a:prstGeom prst="rect">
             <a:avLst/>
@@ -2023,7 +2039,9 @@
           <a:ln/>
         </p:spPr>
         <p:txBody>
-          <a:bodyPr wrap="square" rtlCol="0" anchor="b"/>
+          <a:bodyPr wrap="square" rtlCol="0" anchor="ctr">
+            <a:normAutofit/>
+          </a:bodyPr>
           <a:lstStyle/>
           <a:p>
             <a:pPr algn="ctr" indent="0" marL="0">
@@ -2032,7 +2050,7 @@
             <a:r>
               <a:rPr lang="en-US" sz="4400" b="1" dirty="0">
                 <a:solidFill>
-                  <a:srgbClr val="2563EB"/>
+                  <a:srgbClr val="0F172A"/>
                 </a:solidFill>
                 <a:latin typeface="Arial" pitchFamily="34" charset="0"/>
                 <a:ea typeface="Arial" pitchFamily="34" charset="-122"/>
@@ -2052,8 +2070,8 @@
         </p:nvSpPr>
         <p:spPr>
           <a:xfrm>
-            <a:off x="1219200" y="3977640"/>
-            <a:ext cx="9753600" cy="960120"/>
+            <a:off x="1219200" y="3771900"/>
+            <a:ext cx="9753600" cy="685800"/>
           </a:xfrm>
           <a:prstGeom prst="rect">
             <a:avLst/>
@@ -2062,14 +2080,16 @@
           <a:ln/>
         </p:spPr>
         <p:txBody>
-          <a:bodyPr wrap="square" rtlCol="0" anchor="t"/>
+          <a:bodyPr wrap="square" rtlCol="0" anchor="ctr">
+            <a:normAutofit/>
+          </a:bodyPr>
           <a:lstStyle/>
           <a:p>
             <a:pPr algn="ctr" indent="0" marL="0">
               <a:buNone/>
             </a:pPr>
             <a:r>
-              <a:rPr lang="en-US" sz="2200" dirty="0">
+              <a:rPr lang="en-US" sz="2400" dirty="0">
                 <a:solidFill>
                   <a:srgbClr val="64748B"/>
                 </a:solidFill>
@@ -2079,7 +2099,7 @@
               </a:rPr>
               <a:t>Q4 2026 Executive Summary</a:t>
             </a:r>
-            <a:endParaRPr lang="en-US" sz="2200" dirty="0"/>
+            <a:endParaRPr lang="en-US" sz="2400" dirty="0"/>
           </a:p>
         </p:txBody>
       </p:sp>
@@ -2116,8 +2136,8 @@
         </p:nvSpPr>
         <p:spPr>
           <a:xfrm>
-            <a:off x="609600" y="274320"/>
-            <a:ext cx="10972800" cy="754380"/>
+            <a:off x="609600" y="342900"/>
+            <a:ext cx="10972800" cy="1028700"/>
           </a:xfrm>
           <a:prstGeom prst="rect">
             <a:avLst/>
@@ -2126,58 +2146,38 @@
           <a:ln/>
         </p:spPr>
         <p:txBody>
-          <a:bodyPr wrap="square" rtlCol="0" anchor="t"/>
+          <a:bodyPr wrap="square" rtlCol="0" anchor="t">
+            <a:normAutofit/>
+          </a:bodyPr>
           <a:lstStyle/>
           <a:p>
             <a:pPr indent="0" marL="0">
               <a:buNone/>
             </a:pPr>
             <a:r>
-              <a:rPr lang="en-US" sz="2800" b="1" dirty="0">
+              <a:rPr lang="en-US" sz="3200" b="1" dirty="0">
                 <a:solidFill>
-                  <a:srgbClr val="2563EB"/>
+                  <a:srgbClr val="0F172A"/>
                 </a:solidFill>
                 <a:latin typeface="Arial" pitchFamily="34" charset="0"/>
                 <a:ea typeface="Arial" pitchFamily="34" charset="-122"/>
                 <a:cs typeface="Arial" pitchFamily="34" charset="-120"/>
               </a:rPr>
-              <a:t>Annual Revenue Trajectory By Quarter</a:t>
+              <a:t>ARR Growth from Q1 to Q4</a:t>
             </a:r>
-            <a:endParaRPr lang="en-US" sz="2800" dirty="0"/>
+            <a:endParaRPr lang="en-US" sz="3200" dirty="0"/>
           </a:p>
         </p:txBody>
-      </p:sp>
-      <p:sp>
-        <p:nvSpPr>
-          <p:cNvPr id="4" name="Shape 1"/>
-          <p:cNvSpPr/>
-          <p:nvPr/>
-        </p:nvSpPr>
-        <p:spPr>
-          <a:xfrm>
-            <a:off x="609600" y="1028700"/>
-            <a:ext cx="1219200" cy="54864"/>
-          </a:xfrm>
-          <a:prstGeom prst="roundRect">
-            <a:avLst>
-              <a:gd name="adj" fmla="val 833333"/>
-            </a:avLst>
-          </a:prstGeom>
-          <a:solidFill>
-            <a:srgbClr val="2563EB"/>
-          </a:solidFill>
-          <a:ln/>
-        </p:spPr>
       </p:sp>
       <p:graphicFrame>
         <p:nvGraphicFramePr>
-          <p:cNvPr id="5" name="Chart 0" descr=""/>
+          <p:cNvPr id="4" name="Chart 0" descr=""/>
           <p:cNvGraphicFramePr/>
           <p:nvPr/>
         </p:nvGraphicFramePr>
         <p:xfrm>
           <a:off x="914400" y="914400"/>
-          <a:ext cx="9753600" cy="4251960"/>
+          <a:ext cx="10972800" cy="4389120"/>
         </p:xfrm>
         <a:graphic xmlns:a="http://schemas.openxmlformats.org/drawingml/2006/main">
           <a:graphicData uri="http://schemas.openxmlformats.org/drawingml/2006/chart">
@@ -2187,14 +2187,14 @@
       </p:graphicFrame>
       <p:sp>
         <p:nvSpPr>
-          <p:cNvPr id="6" name="Text 2"/>
+          <p:cNvPr id="5" name="Text 1"/>
           <p:cNvSpPr/>
           <p:nvPr/>
         </p:nvSpPr>
         <p:spPr>
           <a:xfrm>
-            <a:off x="1219200" y="6035040"/>
-            <a:ext cx="9753600" cy="342900"/>
+            <a:off x="609600" y="5897880"/>
+            <a:ext cx="10972800" cy="548640"/>
           </a:xfrm>
           <a:prstGeom prst="rect">
             <a:avLst/>
@@ -2203,14 +2203,16 @@
           <a:ln/>
         </p:spPr>
         <p:txBody>
-          <a:bodyPr wrap="square" rtlCol="0" anchor="ctr"/>
+          <a:bodyPr wrap="square" rtlCol="0" anchor="ctr">
+            <a:normAutofit/>
+          </a:bodyPr>
           <a:lstStyle/>
           <a:p>
             <a:pPr algn="ctr" indent="0" marL="0">
               <a:buNone/>
             </a:pPr>
             <a:r>
-              <a:rPr lang="en-US" sz="1200" i="1" dirty="0">
+              <a:rPr lang="en-US" sz="1500" i="1" dirty="0">
                 <a:solidFill>
                   <a:srgbClr val="64748B"/>
                 </a:solidFill>
@@ -2218,9 +2220,9 @@
                 <a:ea typeface="Calibri" pitchFamily="34" charset="-122"/>
                 <a:cs typeface="Calibri" pitchFamily="34" charset="-120"/>
               </a:rPr>
-              <a:t>ARR expanded by 190% across the full fiscal year.</a:t>
+              <a:t>ARR accelerated consistently across four consecutive fiscal quarters.</a:t>
             </a:r>
-            <a:endParaRPr lang="en-US" sz="1200" dirty="0"/>
+            <a:endParaRPr lang="en-US" sz="1500" dirty="0"/>
           </a:p>
         </p:txBody>
       </p:sp>
@@ -2257,8 +2259,8 @@
         </p:nvSpPr>
         <p:spPr>
           <a:xfrm>
-            <a:off x="609600" y="274320"/>
-            <a:ext cx="10972800" cy="754380"/>
+            <a:off x="609600" y="342900"/>
+            <a:ext cx="10972800" cy="1028700"/>
           </a:xfrm>
           <a:prstGeom prst="rect">
             <a:avLst/>
@@ -2267,16 +2269,18 @@
           <a:ln/>
         </p:spPr>
         <p:txBody>
-          <a:bodyPr wrap="square" rtlCol="0" anchor="t"/>
+          <a:bodyPr wrap="square" rtlCol="0" anchor="t">
+            <a:normAutofit/>
+          </a:bodyPr>
           <a:lstStyle/>
           <a:p>
             <a:pPr indent="0" marL="0">
               <a:buNone/>
             </a:pPr>
             <a:r>
-              <a:rPr lang="en-US" sz="2800" b="1" dirty="0">
+              <a:rPr lang="en-US" sz="3200" b="1" dirty="0">
                 <a:solidFill>
-                  <a:srgbClr val="2563EB"/>
+                  <a:srgbClr val="0F172A"/>
                 </a:solidFill>
                 <a:latin typeface="Arial" pitchFamily="34" charset="0"/>
                 <a:ea typeface="Arial" pitchFamily="34" charset="-122"/>
@@ -2284,41 +2288,19 @@
               </a:rPr>
               <a:t>Customer Retention &amp; Net Dollar Expansion</a:t>
             </a:r>
-            <a:endParaRPr lang="en-US" sz="2800" dirty="0"/>
+            <a:endParaRPr lang="en-US" sz="3200" dirty="0"/>
           </a:p>
         </p:txBody>
-      </p:sp>
-      <p:sp>
-        <p:nvSpPr>
-          <p:cNvPr id="4" name="Shape 1"/>
-          <p:cNvSpPr/>
-          <p:nvPr/>
-        </p:nvSpPr>
-        <p:spPr>
-          <a:xfrm>
-            <a:off x="609600" y="1028700"/>
-            <a:ext cx="1219200" cy="54864"/>
-          </a:xfrm>
-          <a:prstGeom prst="roundRect">
-            <a:avLst>
-              <a:gd name="adj" fmla="val 833333"/>
-            </a:avLst>
-          </a:prstGeom>
-          <a:solidFill>
-            <a:srgbClr val="2563EB"/>
-          </a:solidFill>
-          <a:ln/>
-        </p:spPr>
       </p:sp>
       <p:graphicFrame>
         <p:nvGraphicFramePr>
-          <p:cNvPr id="5" name="Chart 0" descr=""/>
+          <p:cNvPr id="4" name="Chart 0" descr=""/>
           <p:cNvGraphicFramePr/>
           <p:nvPr/>
         </p:nvGraphicFramePr>
         <p:xfrm>
           <a:off x="914400" y="914400"/>
-          <a:ext cx="9753600" cy="4251960"/>
+          <a:ext cx="10972800" cy="4389120"/>
         </p:xfrm>
         <a:graphic xmlns:a="http://schemas.openxmlformats.org/drawingml/2006/main">
           <a:graphicData uri="http://schemas.openxmlformats.org/drawingml/2006/chart">
@@ -2328,14 +2310,14 @@
       </p:graphicFrame>
       <p:sp>
         <p:nvSpPr>
-          <p:cNvPr id="6" name="Text 2"/>
+          <p:cNvPr id="5" name="Text 1"/>
           <p:cNvSpPr/>
           <p:nvPr/>
         </p:nvSpPr>
         <p:spPr>
           <a:xfrm>
-            <a:off x="1219200" y="6035040"/>
-            <a:ext cx="9753600" cy="342900"/>
+            <a:off x="609600" y="5897880"/>
+            <a:ext cx="10972800" cy="548640"/>
           </a:xfrm>
           <a:prstGeom prst="rect">
             <a:avLst/>
@@ -2344,14 +2326,16 @@
           <a:ln/>
         </p:spPr>
         <p:txBody>
-          <a:bodyPr wrap="square" rtlCol="0" anchor="ctr"/>
+          <a:bodyPr wrap="square" rtlCol="0" anchor="ctr">
+            <a:normAutofit/>
+          </a:bodyPr>
           <a:lstStyle/>
           <a:p>
             <a:pPr algn="ctr" indent="0" marL="0">
               <a:buNone/>
             </a:pPr>
             <a:r>
-              <a:rPr lang="en-US" sz="1200" i="1" dirty="0">
+              <a:rPr lang="en-US" sz="1500" i="1" dirty="0">
                 <a:solidFill>
                   <a:srgbClr val="64748B"/>
                 </a:solidFill>
@@ -2361,7 +2345,7 @@
               </a:rPr>
               <a:t>Net Revenue Retention steadily increased to 128%.</a:t>
             </a:r>
-            <a:endParaRPr lang="en-US" sz="1200" dirty="0"/>
+            <a:endParaRPr lang="en-US" sz="1500" dirty="0"/>
           </a:p>
         </p:txBody>
       </p:sp>
@@ -2398,8 +2382,8 @@
         </p:nvSpPr>
         <p:spPr>
           <a:xfrm>
-            <a:off x="609600" y="274320"/>
-            <a:ext cx="10972800" cy="754380"/>
+            <a:off x="609600" y="342900"/>
+            <a:ext cx="10972800" cy="1028700"/>
           </a:xfrm>
           <a:prstGeom prst="rect">
             <a:avLst/>
@@ -2408,16 +2392,18 @@
           <a:ln/>
         </p:spPr>
         <p:txBody>
-          <a:bodyPr wrap="square" rtlCol="0" anchor="t"/>
+          <a:bodyPr wrap="square" rtlCol="0" anchor="t">
+            <a:normAutofit/>
+          </a:bodyPr>
           <a:lstStyle/>
           <a:p>
             <a:pPr indent="0" marL="0">
               <a:buNone/>
             </a:pPr>
             <a:r>
-              <a:rPr lang="en-US" sz="2800" b="1" dirty="0">
+              <a:rPr lang="en-US" sz="3200" b="1" dirty="0">
                 <a:solidFill>
-                  <a:srgbClr val="2563EB"/>
+                  <a:srgbClr val="0F172A"/>
                 </a:solidFill>
                 <a:latin typeface="Arial" pitchFamily="34" charset="0"/>
                 <a:ea typeface="Arial" pitchFamily="34" charset="-122"/>
@@ -2425,41 +2411,19 @@
               </a:rPr>
               <a:t>Platform Revenue Breakdown by Product</a:t>
             </a:r>
-            <a:endParaRPr lang="en-US" sz="2800" dirty="0"/>
+            <a:endParaRPr lang="en-US" sz="3200" dirty="0"/>
           </a:p>
         </p:txBody>
-      </p:sp>
-      <p:sp>
-        <p:nvSpPr>
-          <p:cNvPr id="4" name="Shape 1"/>
-          <p:cNvSpPr/>
-          <p:nvPr/>
-        </p:nvSpPr>
-        <p:spPr>
-          <a:xfrm>
-            <a:off x="609600" y="1028700"/>
-            <a:ext cx="1219200" cy="54864"/>
-          </a:xfrm>
-          <a:prstGeom prst="roundRect">
-            <a:avLst>
-              <a:gd name="adj" fmla="val 833333"/>
-            </a:avLst>
-          </a:prstGeom>
-          <a:solidFill>
-            <a:srgbClr val="2563EB"/>
-          </a:solidFill>
-          <a:ln/>
-        </p:spPr>
       </p:sp>
       <p:graphicFrame>
         <p:nvGraphicFramePr>
-          <p:cNvPr id="5" name="Chart 0" descr=""/>
+          <p:cNvPr id="4" name="Chart 0" descr=""/>
           <p:cNvGraphicFramePr/>
           <p:nvPr/>
         </p:nvGraphicFramePr>
         <p:xfrm>
           <a:off x="914400" y="914400"/>
-          <a:ext cx="9753600" cy="4251960"/>
+          <a:ext cx="10972800" cy="4389120"/>
         </p:xfrm>
         <a:graphic xmlns:a="http://schemas.openxmlformats.org/drawingml/2006/main">
           <a:graphicData uri="http://schemas.openxmlformats.org/drawingml/2006/chart">
@@ -2469,14 +2433,14 @@
       </p:graphicFrame>
       <p:sp>
         <p:nvSpPr>
-          <p:cNvPr id="6" name="Text 2"/>
+          <p:cNvPr id="5" name="Text 1"/>
           <p:cNvSpPr/>
           <p:nvPr/>
         </p:nvSpPr>
         <p:spPr>
           <a:xfrm>
-            <a:off x="1219200" y="6035040"/>
-            <a:ext cx="9753600" cy="342900"/>
+            <a:off x="609600" y="5897880"/>
+            <a:ext cx="10972800" cy="548640"/>
           </a:xfrm>
           <a:prstGeom prst="rect">
             <a:avLst/>
@@ -2485,14 +2449,16 @@
           <a:ln/>
         </p:spPr>
         <p:txBody>
-          <a:bodyPr wrap="square" rtlCol="0" anchor="ctr"/>
+          <a:bodyPr wrap="square" rtlCol="0" anchor="ctr">
+            <a:normAutofit/>
+          </a:bodyPr>
           <a:lstStyle/>
           <a:p>
             <a:pPr algn="ctr" indent="0" marL="0">
               <a:buNone/>
             </a:pPr>
             <a:r>
-              <a:rPr lang="en-US" sz="1200" i="1" dirty="0">
+              <a:rPr lang="en-US" sz="1500" i="1" dirty="0">
                 <a:solidFill>
                   <a:srgbClr val="64748B"/>
                 </a:solidFill>
@@ -2502,7 +2468,7 @@
               </a:rPr>
               <a:t>Enterprise contracts now account for nearly half of revenue.</a:t>
             </a:r>
-            <a:endParaRPr lang="en-US" sz="1200" dirty="0"/>
+            <a:endParaRPr lang="en-US" sz="1500" dirty="0"/>
           </a:p>
         </p:txBody>
       </p:sp>
